--- a/知识工程与质量工程建设_汇报PPT.pptx
+++ b/知识工程与质量工程建设_汇报PPT.pptx
@@ -7,6 +7,7 @@
   <p:sldIdLst>
     <p:sldId id="256" r:id="rId7"/>
     <p:sldId id="257" r:id="rId8"/>
+    <p:sldId id="258" r:id="rId9"/>
   </p:sldIdLst>
   <p:sldSz cx="12191695" cy="6858000" type="screen4x3"/>
   <p:notesSz cx="6858000" cy="9144000"/>
@@ -4803,7 +4804,7 @@
                 <a:ea typeface="微软雅黑"/>
                 <a:cs typeface="微软雅黑"/>
               </a:rPr>
-              <a:t>第 1 页 / 共 2 页</a:t>
+              <a:t>第 1 页 / 共 3 页</a:t>
             </a:r>
           </a:p>
         </p:txBody>
@@ -6577,7 +6578,1265 @@
                 <a:ea typeface="微软雅黑"/>
                 <a:cs typeface="微软雅黑"/>
               </a:rPr>
-              <a:t>第 2 页 / 共 2 页</a:t>
+              <a:t>第 2 页 / 共 3 页</a:t>
+            </a:r>
+          </a:p>
+        </p:txBody>
+      </p:sp>
+    </p:spTree>
+  </p:cSld>
+  <p:clrMapOvr>
+    <a:masterClrMapping/>
+  </p:clrMapOvr>
+</p:sld>
+</file>
+
+<file path=ppt/slides/slide3.xml><?xml version="1.0" encoding="utf-8"?>
+<p:sld xmlns:a="http://schemas.openxmlformats.org/drawingml/2006/main" xmlns:p="http://schemas.openxmlformats.org/presentationml/2006/main" xmlns:r="http://schemas.openxmlformats.org/officeDocument/2006/relationships">
+  <p:cSld>
+    <p:spTree>
+      <p:nvGrpSpPr>
+        <p:cNvPr id="1" name=""/>
+        <p:cNvGrpSpPr/>
+        <p:nvPr/>
+      </p:nvGrpSpPr>
+      <p:grpSpPr/>
+      <p:sp>
+        <p:nvSpPr>
+          <p:cNvPr id="2" name="Rectangle 1"/>
+          <p:cNvSpPr/>
+          <p:nvPr/>
+        </p:nvSpPr>
+        <p:spPr>
+          <a:xfrm>
+            <a:off x="0" y="0"/>
+            <a:ext cx="12191695" cy="6858000"/>
+          </a:xfrm>
+          <a:prstGeom prst="rect">
+            <a:avLst/>
+          </a:prstGeom>
+          <a:solidFill>
+            <a:srgbClr val="FFFFFF"/>
+          </a:solidFill>
+          <a:ln>
+            <a:noFill/>
+          </a:ln>
+          <a:effectLst/>
+        </p:spPr>
+        <p:style>
+          <a:lnRef idx="1">
+            <a:schemeClr val="accent1"/>
+          </a:lnRef>
+          <a:fillRef idx="3">
+            <a:schemeClr val="accent1"/>
+          </a:fillRef>
+          <a:effectRef idx="2">
+            <a:schemeClr val="accent1"/>
+          </a:effectRef>
+          <a:fontRef idx="minor">
+            <a:schemeClr val="lt1"/>
+          </a:fontRef>
+        </p:style>
+        <p:txBody>
+          <a:bodyPr rtlCol="0" anchor="ctr"/>
+          <a:lstStyle/>
+          <a:p>
+            <a:pPr algn="ctr"/>
+          </a:p>
+        </p:txBody>
+      </p:sp>
+      <p:sp>
+        <p:nvSpPr>
+          <p:cNvPr id="3" name="TextBox 2"/>
+          <p:cNvSpPr txBox="1"/>
+          <p:nvPr/>
+        </p:nvSpPr>
+        <p:spPr>
+          <a:xfrm>
+            <a:off x="457200" y="292608"/>
+            <a:ext cx="11277295" cy="548640"/>
+          </a:xfrm>
+          <a:prstGeom prst="rect">
+            <a:avLst/>
+          </a:prstGeom>
+          <a:noFill/>
+        </p:spPr>
+        <p:txBody>
+          <a:bodyPr wrap="square" lIns="0" tIns="0" bIns="0">
+            <a:spAutoFit/>
+          </a:bodyPr>
+          <a:lstStyle/>
+          <a:p>
+            <a:pPr algn="l"/>
+            <a:r>
+              <a:rPr sz="2400" b="1" i="0">
+                <a:solidFill>
+                  <a:srgbClr val="C00000"/>
+                </a:solidFill>
+                <a:latin typeface="微软雅黑"/>
+                <a:ea typeface="微软雅黑"/>
+                <a:cs typeface="微软雅黑"/>
+              </a:rPr>
+              <a:t>Skill 和 Spec 规范建设进展</a:t>
+            </a:r>
+          </a:p>
+        </p:txBody>
+      </p:sp>
+      <p:sp>
+        <p:nvSpPr>
+          <p:cNvPr id="4" name="Rectangle 3"/>
+          <p:cNvSpPr/>
+          <p:nvPr/>
+        </p:nvSpPr>
+        <p:spPr>
+          <a:xfrm>
+            <a:off x="457200" y="868680"/>
+            <a:ext cx="11277295" cy="27940"/>
+          </a:xfrm>
+          <a:prstGeom prst="rect">
+            <a:avLst/>
+          </a:prstGeom>
+          <a:solidFill>
+            <a:srgbClr val="C00000"/>
+          </a:solidFill>
+          <a:ln>
+            <a:noFill/>
+          </a:ln>
+          <a:effectLst/>
+        </p:spPr>
+        <p:style>
+          <a:lnRef idx="1">
+            <a:schemeClr val="accent1"/>
+          </a:lnRef>
+          <a:fillRef idx="3">
+            <a:schemeClr val="accent1"/>
+          </a:fillRef>
+          <a:effectRef idx="2">
+            <a:schemeClr val="accent1"/>
+          </a:effectRef>
+          <a:fontRef idx="minor">
+            <a:schemeClr val="lt1"/>
+          </a:fontRef>
+        </p:style>
+        <p:txBody>
+          <a:bodyPr rtlCol="0" anchor="ctr"/>
+          <a:lstStyle/>
+          <a:p>
+            <a:pPr algn="ctr"/>
+          </a:p>
+        </p:txBody>
+      </p:sp>
+      <p:sp>
+        <p:nvSpPr>
+          <p:cNvPr id="5" name="Rectangle 4"/>
+          <p:cNvSpPr/>
+          <p:nvPr/>
+        </p:nvSpPr>
+        <p:spPr>
+          <a:xfrm>
+            <a:off x="457200" y="969264"/>
+            <a:ext cx="11277295" cy="365760"/>
+          </a:xfrm>
+          <a:prstGeom prst="rect">
+            <a:avLst/>
+          </a:prstGeom>
+          <a:solidFill>
+            <a:srgbClr val="F2F2F2"/>
+          </a:solidFill>
+          <a:ln>
+            <a:noFill/>
+          </a:ln>
+          <a:effectLst/>
+        </p:spPr>
+        <p:style>
+          <a:lnRef idx="1">
+            <a:schemeClr val="accent1"/>
+          </a:lnRef>
+          <a:fillRef idx="3">
+            <a:schemeClr val="accent1"/>
+          </a:fillRef>
+          <a:effectRef idx="2">
+            <a:schemeClr val="accent1"/>
+          </a:effectRef>
+          <a:fontRef idx="minor">
+            <a:schemeClr val="lt1"/>
+          </a:fontRef>
+        </p:style>
+        <p:txBody>
+          <a:bodyPr rtlCol="0" anchor="ctr" wrap="square" lIns="109728" tIns="18288" bIns="18288"/>
+          <a:lstStyle/>
+          <a:p>
+            <a:pPr algn="l"/>
+            <a:r>
+              <a:rPr sz="1400" b="1" i="0">
+                <a:solidFill>
+                  <a:srgbClr val="000000"/>
+                </a:solidFill>
+                <a:latin typeface="微软雅黑"/>
+                <a:ea typeface="微软雅黑"/>
+                <a:cs typeface="微软雅黑"/>
+              </a:rPr>
+              <a:t>背景、整体进展、开发流程与下一步计划</a:t>
+            </a:r>
+          </a:p>
+        </p:txBody>
+      </p:sp>
+      <p:sp>
+        <p:nvSpPr>
+          <p:cNvPr id="6" name="TextBox 5"/>
+          <p:cNvSpPr txBox="1"/>
+          <p:nvPr/>
+        </p:nvSpPr>
+        <p:spPr>
+          <a:xfrm>
+            <a:off x="457200" y="1408176"/>
+            <a:ext cx="11277295" cy="658368"/>
+          </a:xfrm>
+          <a:prstGeom prst="rect">
+            <a:avLst/>
+          </a:prstGeom>
+          <a:noFill/>
+        </p:spPr>
+        <p:txBody>
+          <a:bodyPr wrap="square" lIns="0" tIns="0">
+            <a:spAutoFit/>
+          </a:bodyPr>
+          <a:lstStyle/>
+          <a:p>
+            <a:pPr algn="l">
+              <a:spcBef>
+                <a:spcPts val="150"/>
+              </a:spcBef>
+              <a:spcAft>
+                <a:spcPts val="0"/>
+              </a:spcAft>
+            </a:pPr>
+            <a:r>
+              <a:rPr sz="1100" b="1" i="0">
+                <a:solidFill>
+                  <a:srgbClr val="0000FF"/>
+                </a:solidFill>
+                <a:latin typeface="微软雅黑"/>
+                <a:ea typeface="微软雅黑"/>
+                <a:cs typeface="微软雅黑"/>
+              </a:rPr>
+              <a:t>背景:</a:t>
+            </a:r>
+            <a:r>
+              <a:rPr sz="1100" b="0" i="0">
+                <a:solidFill>
+                  <a:srgbClr val="000000"/>
+                </a:solidFill>
+                <a:latin typeface="微软雅黑"/>
+                <a:ea typeface="微软雅黑"/>
+                <a:cs typeface="微软雅黑"/>
+              </a:rPr>
+              <a:t>各团队自行开发的 Skill 越来越多,缺乏统一管理方式,不利于资产有序沉淀与能力共享。  </a:t>
+            </a:r>
+            <a:r>
+              <a:rPr sz="1100" b="1" i="0">
+                <a:solidFill>
+                  <a:srgbClr val="0000FF"/>
+                </a:solidFill>
+                <a:latin typeface="微软雅黑"/>
+                <a:ea typeface="微软雅黑"/>
+                <a:cs typeface="微软雅黑"/>
+              </a:rPr>
+              <a:t>整体进展:</a:t>
+            </a:r>
+            <a:r>
+              <a:rPr sz="1100" b="0" i="0">
+                <a:solidFill>
+                  <a:srgbClr val="000000"/>
+                </a:solidFill>
+                <a:latin typeface="微软雅黑"/>
+                <a:ea typeface="微软雅黑"/>
+                <a:cs typeface="微软雅黑"/>
+              </a:rPr>
+              <a:t>已完成</a:t>
+            </a:r>
+            <a:r>
+              <a:rPr sz="1100" b="1" i="0">
+                <a:solidFill>
+                  <a:srgbClr val="0000FF"/>
+                </a:solidFill>
+                <a:latin typeface="微软雅黑"/>
+                <a:ea typeface="微软雅黑"/>
+                <a:cs typeface="微软雅黑"/>
+              </a:rPr>
+              <a:t>公司级 Skill 管理规范评审</a:t>
+            </a:r>
+            <a:r>
+              <a:rPr sz="1100" b="0" i="0">
+                <a:solidFill>
+                  <a:srgbClr val="000000"/>
+                </a:solidFill>
+                <a:latin typeface="微软雅黑"/>
+                <a:ea typeface="微软雅黑"/>
+                <a:cs typeface="微软雅黑"/>
+              </a:rPr>
+              <a:t>并达成初步一致;AI 团队已落地 </a:t>
+            </a:r>
+            <a:r>
+              <a:rPr sz="1100" b="1" i="0">
+                <a:solidFill>
+                  <a:srgbClr val="0000FF"/>
+                </a:solidFill>
+                <a:latin typeface="微软雅黑"/>
+                <a:ea typeface="微软雅黑"/>
+                <a:cs typeface="微软雅黑"/>
+              </a:rPr>
+              <a:t>LM 团队级 Skill 管理规范试点</a:t>
+            </a:r>
+            <a:r>
+              <a:rPr sz="1100" b="0" i="0">
+                <a:solidFill>
+                  <a:srgbClr val="000000"/>
+                </a:solidFill>
+                <a:latin typeface="微软雅黑"/>
+                <a:ea typeface="微软雅黑"/>
+                <a:cs typeface="微软雅黑"/>
+              </a:rPr>
+              <a:t>。</a:t>
+            </a:r>
+          </a:p>
+        </p:txBody>
+      </p:sp>
+      <p:sp>
+        <p:nvSpPr>
+          <p:cNvPr id="7" name="Rounded Rectangle 6"/>
+          <p:cNvSpPr/>
+          <p:nvPr/>
+        </p:nvSpPr>
+        <p:spPr>
+          <a:xfrm>
+            <a:off x="457200" y="2212848"/>
+            <a:ext cx="5501487" cy="932688"/>
+          </a:xfrm>
+          <a:prstGeom prst="roundRect">
+            <a:avLst>
+              <a:gd name="adj" fmla="val 5000"/>
+            </a:avLst>
+          </a:prstGeom>
+          <a:solidFill>
+            <a:srgbClr val="FFFFFF"/>
+          </a:solidFill>
+          <a:ln w="12700">
+            <a:solidFill>
+              <a:srgbClr val="D9D9D9"/>
+            </a:solidFill>
+          </a:ln>
+          <a:effectLst/>
+        </p:spPr>
+        <p:style>
+          <a:lnRef idx="1">
+            <a:schemeClr val="accent1"/>
+          </a:lnRef>
+          <a:fillRef idx="3">
+            <a:schemeClr val="accent1"/>
+          </a:fillRef>
+          <a:effectRef idx="2">
+            <a:schemeClr val="accent1"/>
+          </a:effectRef>
+          <a:fontRef idx="minor">
+            <a:schemeClr val="lt1"/>
+          </a:fontRef>
+        </p:style>
+        <p:txBody>
+          <a:bodyPr rtlCol="0" anchor="t" wrap="square" lIns="128016" rIns="109728" tIns="82296" bIns="73152"/>
+          <a:lstStyle/>
+          <a:p>
+            <a:pPr algn="l">
+              <a:spcAft>
+                <a:spcPts val="300"/>
+              </a:spcAft>
+            </a:pPr>
+            <a:r>
+              <a:rPr sz="1100" b="1" i="0">
+                <a:solidFill>
+                  <a:srgbClr val="C00000"/>
+                </a:solidFill>
+                <a:latin typeface="微软雅黑"/>
+                <a:ea typeface="微软雅黑"/>
+                <a:cs typeface="微软雅黑"/>
+              </a:rPr>
+              <a:t>Skill 开发流程(端到端)</a:t>
+            </a:r>
+          </a:p>
+          <a:p>
+            <a:pPr algn="l">
+              <a:lnSpc>
+                <a:spcPct val="115000"/>
+              </a:lnSpc>
+              <a:spcBef>
+                <a:spcPts val="150"/>
+              </a:spcBef>
+              <a:spcAft>
+                <a:spcPts val="150"/>
+              </a:spcAft>
+            </a:pPr>
+            <a:r>
+              <a:rPr sz="1000" b="1" i="0">
+                <a:solidFill>
+                  <a:srgbClr val="0000FF"/>
+                </a:solidFill>
+                <a:latin typeface="微软雅黑"/>
+                <a:ea typeface="微软雅黑"/>
+                <a:cs typeface="微软雅黑"/>
+              </a:rPr>
+              <a:t>开发</a:t>
+            </a:r>
+            <a:r>
+              <a:rPr sz="1000" b="0" i="0">
+                <a:solidFill>
+                  <a:srgbClr val="000000"/>
+                </a:solidFill>
+                <a:latin typeface="微软雅黑"/>
+                <a:ea typeface="微软雅黑"/>
+                <a:cs typeface="微软雅黑"/>
+              </a:rPr>
+              <a:t>(依 Skill 开规范) → </a:t>
+            </a:r>
+            <a:r>
+              <a:rPr sz="1000" b="1" i="0">
+                <a:solidFill>
+                  <a:srgbClr val="0000FF"/>
+                </a:solidFill>
+                <a:latin typeface="微软雅黑"/>
+                <a:ea typeface="微软雅黑"/>
+                <a:cs typeface="微软雅黑"/>
+              </a:rPr>
+              <a:t>提交</a:t>
+            </a:r>
+            <a:r>
+              <a:rPr sz="1000" b="0" i="0">
+                <a:solidFill>
+                  <a:srgbClr val="000000"/>
+                </a:solidFill>
+                <a:latin typeface="微软雅黑"/>
+                <a:ea typeface="微软雅黑"/>
+                <a:cs typeface="微软雅黑"/>
+              </a:rPr>
+              <a:t>(依归档规则) → </a:t>
+            </a:r>
+            <a:r>
+              <a:rPr sz="1000" b="1" i="0">
+                <a:solidFill>
+                  <a:srgbClr val="0000FF"/>
+                </a:solidFill>
+                <a:latin typeface="微软雅黑"/>
+                <a:ea typeface="微软雅黑"/>
+                <a:cs typeface="微软雅黑"/>
+              </a:rPr>
+              <a:t>门禁检测</a:t>
+            </a:r>
+            <a:r>
+              <a:rPr sz="1000" b="0" i="0">
+                <a:solidFill>
+                  <a:srgbClr val="000000"/>
+                </a:solidFill>
+                <a:latin typeface="微软雅黑"/>
+                <a:ea typeface="微软雅黑"/>
+                <a:cs typeface="微软雅黑"/>
+              </a:rPr>
+              <a:t>(依生成的门禁规则) → </a:t>
+            </a:r>
+            <a:r>
+              <a:rPr sz="1000" b="1" i="0">
+                <a:solidFill>
+                  <a:srgbClr val="0000FF"/>
+                </a:solidFill>
+                <a:latin typeface="微软雅黑"/>
+                <a:ea typeface="微软雅黑"/>
+                <a:cs typeface="微软雅黑"/>
+              </a:rPr>
+              <a:t>人工审核</a:t>
+            </a:r>
+            <a:r>
+              <a:rPr sz="1000" b="0" i="0">
+                <a:solidFill>
+                  <a:srgbClr val="000000"/>
+                </a:solidFill>
+                <a:latin typeface="微软雅黑"/>
+                <a:ea typeface="微软雅黑"/>
+                <a:cs typeface="微软雅黑"/>
+              </a:rPr>
+              <a:t> → </a:t>
+            </a:r>
+            <a:r>
+              <a:rPr sz="1000" b="1" i="0">
+                <a:solidFill>
+                  <a:srgbClr val="0000FF"/>
+                </a:solidFill>
+                <a:latin typeface="微软雅黑"/>
+                <a:ea typeface="微软雅黑"/>
+                <a:cs typeface="微软雅黑"/>
+              </a:rPr>
+              <a:t>发布</a:t>
+            </a:r>
+            <a:r>
+              <a:rPr sz="1000" b="0" i="0">
+                <a:solidFill>
+                  <a:srgbClr val="000000"/>
+                </a:solidFill>
+                <a:latin typeface="微软雅黑"/>
+                <a:ea typeface="微软雅黑"/>
+                <a:cs typeface="微软雅黑"/>
+              </a:rPr>
+              <a:t> → </a:t>
+            </a:r>
+            <a:r>
+              <a:rPr sz="1000" b="1" i="0">
+                <a:solidFill>
+                  <a:srgbClr val="0000FF"/>
+                </a:solidFill>
+                <a:latin typeface="微软雅黑"/>
+                <a:ea typeface="微软雅黑"/>
+                <a:cs typeface="微软雅黑"/>
+              </a:rPr>
+              <a:t>集成到 CodeAgent 使用</a:t>
+            </a:r>
+          </a:p>
+        </p:txBody>
+      </p:sp>
+      <p:sp>
+        <p:nvSpPr>
+          <p:cNvPr id="8" name="Rounded Rectangle 7"/>
+          <p:cNvSpPr/>
+          <p:nvPr/>
+        </p:nvSpPr>
+        <p:spPr>
+          <a:xfrm>
+            <a:off x="457200" y="3291840"/>
+            <a:ext cx="5501487" cy="1737360"/>
+          </a:xfrm>
+          <a:prstGeom prst="roundRect">
+            <a:avLst>
+              <a:gd name="adj" fmla="val 5000"/>
+            </a:avLst>
+          </a:prstGeom>
+          <a:solidFill>
+            <a:srgbClr val="FFFFFF"/>
+          </a:solidFill>
+          <a:ln w="12700">
+            <a:solidFill>
+              <a:srgbClr val="D9D9D9"/>
+            </a:solidFill>
+          </a:ln>
+          <a:effectLst/>
+        </p:spPr>
+        <p:style>
+          <a:lnRef idx="1">
+            <a:schemeClr val="accent1"/>
+          </a:lnRef>
+          <a:fillRef idx="3">
+            <a:schemeClr val="accent1"/>
+          </a:fillRef>
+          <a:effectRef idx="2">
+            <a:schemeClr val="accent1"/>
+          </a:effectRef>
+          <a:fontRef idx="minor">
+            <a:schemeClr val="lt1"/>
+          </a:fontRef>
+        </p:style>
+        <p:txBody>
+          <a:bodyPr rtlCol="0" anchor="t" wrap="square" lIns="128016" rIns="109728" tIns="82296" bIns="73152"/>
+          <a:lstStyle/>
+          <a:p>
+            <a:pPr algn="l">
+              <a:spcAft>
+                <a:spcPts val="300"/>
+              </a:spcAft>
+            </a:pPr>
+            <a:r>
+              <a:rPr sz="1150" b="1" i="0">
+                <a:solidFill>
+                  <a:srgbClr val="C00000"/>
+                </a:solidFill>
+                <a:latin typeface="微软雅黑"/>
+                <a:ea typeface="微软雅黑"/>
+                <a:cs typeface="微软雅黑"/>
+              </a:rPr>
+              <a:t>进展</a:t>
+            </a:r>
+          </a:p>
+          <a:p>
+            <a:pPr algn="l">
+              <a:spcBef>
+                <a:spcPts val="150"/>
+              </a:spcBef>
+              <a:spcAft>
+                <a:spcPts val="150"/>
+              </a:spcAft>
+            </a:pPr>
+            <a:r>
+              <a:rPr sz="950" b="0" i="0">
+                <a:solidFill>
+                  <a:srgbClr val="000000"/>
+                </a:solidFill>
+                <a:latin typeface="微软雅黑"/>
+                <a:ea typeface="微软雅黑"/>
+                <a:cs typeface="微软雅黑"/>
+              </a:rPr>
+              <a:t>• </a:t>
+            </a:r>
+            <a:r>
+              <a:rPr sz="950" b="1" i="0">
+                <a:solidFill>
+                  <a:srgbClr val="0000FF"/>
+                </a:solidFill>
+                <a:latin typeface="微软雅黑"/>
+                <a:ea typeface="微软雅黑"/>
+                <a:cs typeface="微软雅黑"/>
+              </a:rPr>
+              <a:t>Skill 开规范</a:t>
+            </a:r>
+            <a:r>
+              <a:rPr sz="950" b="0" i="0">
+                <a:solidFill>
+                  <a:srgbClr val="000000"/>
+                </a:solidFill>
+                <a:latin typeface="微软雅黑"/>
+                <a:ea typeface="微软雅黑"/>
+                <a:cs typeface="微软雅黑"/>
+              </a:rPr>
+              <a:t>:公司级</a:t>
+            </a:r>
+            <a:r>
+              <a:rPr sz="950" b="1" i="0">
+                <a:solidFill>
+                  <a:srgbClr val="0000FF"/>
+                </a:solidFill>
+                <a:latin typeface="微软雅黑"/>
+                <a:ea typeface="微软雅黑"/>
+                <a:cs typeface="微软雅黑"/>
+              </a:rPr>
+              <a:t>已发布</a:t>
+            </a:r>
+            <a:r>
+              <a:rPr sz="950" b="0" i="0">
+                <a:solidFill>
+                  <a:srgbClr val="000000"/>
+                </a:solidFill>
+                <a:latin typeface="微软雅黑"/>
+                <a:ea typeface="微软雅黑"/>
+                <a:cs typeface="微软雅黑"/>
+              </a:rPr>
+              <a:t>;产品线级</a:t>
+            </a:r>
+            <a:r>
+              <a:rPr sz="950" b="1" i="0">
+                <a:solidFill>
+                  <a:srgbClr val="0000FF"/>
+                </a:solidFill>
+                <a:latin typeface="微软雅黑"/>
+                <a:ea typeface="微软雅黑"/>
+                <a:cs typeface="微软雅黑"/>
+              </a:rPr>
+              <a:t>初稿</a:t>
+            </a:r>
+            <a:r>
+              <a:rPr sz="950" b="0" i="0">
+                <a:solidFill>
+                  <a:srgbClr val="000000"/>
+                </a:solidFill>
+                <a:latin typeface="微软雅黑"/>
+                <a:ea typeface="微软雅黑"/>
+                <a:cs typeface="微软雅黑"/>
+              </a:rPr>
+              <a:t>;PDU 级</a:t>
+            </a:r>
+            <a:r>
+              <a:rPr sz="950" b="1" i="0">
+                <a:solidFill>
+                  <a:srgbClr val="0000FF"/>
+                </a:solidFill>
+                <a:latin typeface="微软雅黑"/>
+                <a:ea typeface="微软雅黑"/>
+                <a:cs typeface="微软雅黑"/>
+              </a:rPr>
+              <a:t>待定义</a:t>
+            </a:r>
+            <a:r>
+              <a:rPr sz="950" b="0" i="0">
+                <a:solidFill>
+                  <a:srgbClr val="000000"/>
+                </a:solidFill>
+                <a:latin typeface="微软雅黑"/>
+                <a:ea typeface="微软雅黑"/>
+                <a:cs typeface="微软雅黑"/>
+              </a:rPr>
+              <a:t>;AI 应用开发部定义</a:t>
+            </a:r>
+            <a:r>
+              <a:rPr sz="950" b="1" i="0">
+                <a:solidFill>
+                  <a:srgbClr val="0000FF"/>
+                </a:solidFill>
+                <a:latin typeface="微软雅黑"/>
+                <a:ea typeface="微软雅黑"/>
+                <a:cs typeface="微软雅黑"/>
+              </a:rPr>
+              <a:t>LM 团队级规范</a:t>
+            </a:r>
+            <a:r>
+              <a:rPr sz="950" b="0" i="0">
+                <a:solidFill>
+                  <a:srgbClr val="000000"/>
+                </a:solidFill>
+                <a:latin typeface="微软雅黑"/>
+                <a:ea typeface="微软雅黑"/>
+                <a:cs typeface="微软雅黑"/>
+              </a:rPr>
+              <a:t>试点。</a:t>
+            </a:r>
+          </a:p>
+          <a:p>
+            <a:pPr algn="l">
+              <a:spcBef>
+                <a:spcPts val="150"/>
+              </a:spcBef>
+              <a:spcAft>
+                <a:spcPts val="150"/>
+              </a:spcAft>
+            </a:pPr>
+            <a:r>
+              <a:rPr sz="950" b="0" i="0">
+                <a:solidFill>
+                  <a:srgbClr val="000000"/>
+                </a:solidFill>
+                <a:latin typeface="微软雅黑"/>
+                <a:ea typeface="微软雅黑"/>
+                <a:cs typeface="微软雅黑"/>
+              </a:rPr>
+              <a:t>• </a:t>
+            </a:r>
+            <a:r>
+              <a:rPr sz="950" b="1" i="0">
+                <a:solidFill>
+                  <a:srgbClr val="0000FF"/>
+                </a:solidFill>
+                <a:latin typeface="微软雅黑"/>
+                <a:ea typeface="微软雅黑"/>
+                <a:cs typeface="微软雅黑"/>
+              </a:rPr>
+              <a:t>Skill 归档规则</a:t>
+            </a:r>
+            <a:r>
+              <a:rPr sz="950" b="0" i="0">
+                <a:solidFill>
+                  <a:srgbClr val="000000"/>
+                </a:solidFill>
+                <a:latin typeface="微软雅黑"/>
+                <a:ea typeface="微软雅黑"/>
+                <a:cs typeface="微软雅黑"/>
+              </a:rPr>
+              <a:t>:CMC 例会</a:t>
+            </a:r>
+            <a:r>
+              <a:rPr sz="950" b="1" i="0">
+                <a:solidFill>
+                  <a:srgbClr val="0000FF"/>
+                </a:solidFill>
+                <a:latin typeface="微软雅黑"/>
+                <a:ea typeface="微软雅黑"/>
+                <a:cs typeface="微软雅黑"/>
+              </a:rPr>
+              <a:t>已对齐达成一致</a:t>
+            </a:r>
+            <a:r>
+              <a:rPr sz="950" b="0" i="0">
+                <a:solidFill>
+                  <a:srgbClr val="000000"/>
+                </a:solidFill>
+                <a:latin typeface="微软雅黑"/>
+                <a:ea typeface="微软雅黑"/>
+                <a:cs typeface="微软雅黑"/>
+              </a:rPr>
+              <a:t> —— 代码仓特有存于 </a:t>
+            </a:r>
+            <a:r>
+              <a:rPr sz="950" b="1" i="0">
+                <a:solidFill>
+                  <a:srgbClr val="0000FF"/>
+                </a:solidFill>
+                <a:latin typeface="微软雅黑"/>
+                <a:ea typeface="微软雅黑"/>
+                <a:cs typeface="微软雅黑"/>
+              </a:rPr>
+              <a:t>.agent/skills 目录</a:t>
+            </a:r>
+            <a:r>
+              <a:rPr sz="950" b="0" i="0">
+                <a:solidFill>
+                  <a:srgbClr val="000000"/>
+                </a:solidFill>
+                <a:latin typeface="微软雅黑"/>
+                <a:ea typeface="微软雅黑"/>
+                <a:cs typeface="微软雅黑"/>
+              </a:rPr>
+              <a:t>;跨仓公共</a:t>
+            </a:r>
+            <a:r>
+              <a:rPr sz="950" b="1" i="0">
+                <a:solidFill>
+                  <a:srgbClr val="0000FF"/>
+                </a:solidFill>
+                <a:latin typeface="微软雅黑"/>
+                <a:ea typeface="微软雅黑"/>
+                <a:cs typeface="微软雅黑"/>
+              </a:rPr>
+              <a:t>推送至产品线 skill 仓</a:t>
+            </a:r>
+            <a:r>
+              <a:rPr sz="950" b="0" i="0">
+                <a:solidFill>
+                  <a:srgbClr val="000000"/>
+                </a:solidFill>
+                <a:latin typeface="微软雅黑"/>
+                <a:ea typeface="微软雅黑"/>
+                <a:cs typeface="微软雅黑"/>
+              </a:rPr>
+              <a:t>。</a:t>
+            </a:r>
+          </a:p>
+          <a:p>
+            <a:pPr algn="l">
+              <a:spcBef>
+                <a:spcPts val="150"/>
+              </a:spcBef>
+              <a:spcAft>
+                <a:spcPts val="150"/>
+              </a:spcAft>
+            </a:pPr>
+            <a:r>
+              <a:rPr sz="950" b="0" i="0">
+                <a:solidFill>
+                  <a:srgbClr val="000000"/>
+                </a:solidFill>
+                <a:latin typeface="微软雅黑"/>
+                <a:ea typeface="微软雅黑"/>
+                <a:cs typeface="微软雅黑"/>
+              </a:rPr>
+              <a:t>• </a:t>
+            </a:r>
+            <a:r>
+              <a:rPr sz="950" b="1" i="0">
+                <a:solidFill>
+                  <a:srgbClr val="0000FF"/>
+                </a:solidFill>
+                <a:latin typeface="微软雅黑"/>
+                <a:ea typeface="微软雅黑"/>
+                <a:cs typeface="微软雅黑"/>
+              </a:rPr>
+              <a:t>Skill 门禁检查规则</a:t>
+            </a:r>
+            <a:r>
+              <a:rPr sz="950" b="0" i="0">
+                <a:solidFill>
+                  <a:srgbClr val="000000"/>
+                </a:solidFill>
+                <a:latin typeface="微软雅黑"/>
+                <a:ea typeface="微软雅黑"/>
+                <a:cs typeface="微软雅黑"/>
+              </a:rPr>
+              <a:t>:产品线</a:t>
+            </a:r>
+            <a:r>
+              <a:rPr sz="950" b="1" i="0">
+                <a:solidFill>
+                  <a:srgbClr val="0000FF"/>
+                </a:solidFill>
+                <a:latin typeface="微软雅黑"/>
+                <a:ea typeface="微软雅黑"/>
+                <a:cs typeface="微软雅黑"/>
+              </a:rPr>
+              <a:t>已完成规则生成与门禁摸底</a:t>
+            </a:r>
+            <a:r>
+              <a:rPr sz="950" b="0" i="0">
+                <a:solidFill>
+                  <a:srgbClr val="000000"/>
+                </a:solidFill>
+                <a:latin typeface="微软雅黑"/>
+                <a:ea typeface="微软雅黑"/>
+                <a:cs typeface="微软雅黑"/>
+              </a:rPr>
+              <a:t>,共 </a:t>
+            </a:r>
+            <a:r>
+              <a:rPr sz="950" b="1" i="0">
+                <a:solidFill>
+                  <a:srgbClr val="0000FF"/>
+                </a:solidFill>
+                <a:latin typeface="微软雅黑"/>
+                <a:ea typeface="微软雅黑"/>
+                <a:cs typeface="微软雅黑"/>
+              </a:rPr>
+              <a:t>51 个检查规则项</a:t>
+            </a:r>
+            <a:r>
+              <a:rPr sz="950" b="0" i="0">
+                <a:solidFill>
+                  <a:srgbClr val="000000"/>
+                </a:solidFill>
+                <a:latin typeface="微软雅黑"/>
+                <a:ea typeface="微软雅黑"/>
+                <a:cs typeface="微软雅黑"/>
+              </a:rPr>
+              <a:t>。</a:t>
+            </a:r>
+          </a:p>
+        </p:txBody>
+      </p:sp>
+      <p:sp>
+        <p:nvSpPr>
+          <p:cNvPr id="9" name="Rounded Rectangle 8"/>
+          <p:cNvSpPr/>
+          <p:nvPr/>
+        </p:nvSpPr>
+        <p:spPr>
+          <a:xfrm>
+            <a:off x="457200" y="5175504"/>
+            <a:ext cx="5501487" cy="1243584"/>
+          </a:xfrm>
+          <a:prstGeom prst="roundRect">
+            <a:avLst>
+              <a:gd name="adj" fmla="val 5000"/>
+            </a:avLst>
+          </a:prstGeom>
+          <a:solidFill>
+            <a:srgbClr val="FFFFFF"/>
+          </a:solidFill>
+          <a:ln w="12700">
+            <a:solidFill>
+              <a:srgbClr val="D9D9D9"/>
+            </a:solidFill>
+          </a:ln>
+          <a:effectLst/>
+        </p:spPr>
+        <p:style>
+          <a:lnRef idx="1">
+            <a:schemeClr val="accent1"/>
+          </a:lnRef>
+          <a:fillRef idx="3">
+            <a:schemeClr val="accent1"/>
+          </a:fillRef>
+          <a:effectRef idx="2">
+            <a:schemeClr val="accent1"/>
+          </a:effectRef>
+          <a:fontRef idx="minor">
+            <a:schemeClr val="lt1"/>
+          </a:fontRef>
+        </p:style>
+        <p:txBody>
+          <a:bodyPr rtlCol="0" anchor="t" wrap="square" lIns="128016" rIns="109728" tIns="82296" bIns="73152"/>
+          <a:lstStyle/>
+          <a:p>
+            <a:pPr algn="l">
+              <a:spcAft>
+                <a:spcPts val="300"/>
+              </a:spcAft>
+            </a:pPr>
+            <a:r>
+              <a:rPr sz="1150" b="1" i="0">
+                <a:solidFill>
+                  <a:srgbClr val="C00000"/>
+                </a:solidFill>
+                <a:latin typeface="微软雅黑"/>
+                <a:ea typeface="微软雅黑"/>
+                <a:cs typeface="微软雅黑"/>
+              </a:rPr>
+              <a:t>下一步计划</a:t>
+            </a:r>
+          </a:p>
+          <a:p>
+            <a:pPr algn="l">
+              <a:spcBef>
+                <a:spcPts val="150"/>
+              </a:spcBef>
+              <a:spcAft>
+                <a:spcPts val="150"/>
+              </a:spcAft>
+            </a:pPr>
+            <a:r>
+              <a:rPr sz="950" b="0" i="0">
+                <a:solidFill>
+                  <a:srgbClr val="000000"/>
+                </a:solidFill>
+                <a:latin typeface="微软雅黑"/>
+                <a:ea typeface="微软雅黑"/>
+                <a:cs typeface="微软雅黑"/>
+              </a:rPr>
+              <a:t>• </a:t>
+            </a:r>
+            <a:r>
+              <a:rPr sz="950" b="0" i="0">
+                <a:solidFill>
+                  <a:srgbClr val="000000"/>
+                </a:solidFill>
+                <a:latin typeface="微软雅黑"/>
+                <a:ea typeface="微软雅黑"/>
+                <a:cs typeface="微软雅黑"/>
+              </a:rPr>
+              <a:t>基于各层级 Skill 管理规范完成 </a:t>
+            </a:r>
+            <a:r>
+              <a:rPr sz="950" b="1" i="0">
+                <a:solidFill>
+                  <a:srgbClr val="0000FF"/>
+                </a:solidFill>
+                <a:latin typeface="微软雅黑"/>
+                <a:ea typeface="微软雅黑"/>
+                <a:cs typeface="微软雅黑"/>
+              </a:rPr>
+              <a:t>Skill 治理</a:t>
+            </a:r>
+            <a:r>
+              <a:rPr sz="950" b="0" i="0">
+                <a:solidFill>
+                  <a:srgbClr val="000000"/>
+                </a:solidFill>
+                <a:latin typeface="微软雅黑"/>
+                <a:ea typeface="微软雅黑"/>
+                <a:cs typeface="微软雅黑"/>
+              </a:rPr>
+              <a:t>,skill </a:t>
+            </a:r>
+            <a:r>
+              <a:rPr sz="950" b="1" i="0">
+                <a:solidFill>
+                  <a:srgbClr val="0000FF"/>
+                </a:solidFill>
+                <a:latin typeface="微软雅黑"/>
+                <a:ea typeface="微软雅黑"/>
+                <a:cs typeface="微软雅黑"/>
+              </a:rPr>
+              <a:t>归置到位</a:t>
+            </a:r>
+            <a:r>
+              <a:rPr sz="950" b="0" i="0">
+                <a:solidFill>
+                  <a:srgbClr val="000000"/>
+                </a:solidFill>
+                <a:latin typeface="微软雅黑"/>
+                <a:ea typeface="微软雅黑"/>
+                <a:cs typeface="微软雅黑"/>
+              </a:rPr>
+              <a:t>；</a:t>
+            </a:r>
+          </a:p>
+          <a:p>
+            <a:pPr algn="l">
+              <a:spcBef>
+                <a:spcPts val="150"/>
+              </a:spcBef>
+              <a:spcAft>
+                <a:spcPts val="150"/>
+              </a:spcAft>
+            </a:pPr>
+            <a:r>
+              <a:rPr sz="950" b="0" i="0">
+                <a:solidFill>
+                  <a:srgbClr val="000000"/>
+                </a:solidFill>
+                <a:latin typeface="微软雅黑"/>
+                <a:ea typeface="微软雅黑"/>
+                <a:cs typeface="微软雅黑"/>
+              </a:rPr>
+              <a:t>• </a:t>
+            </a:r>
+            <a:r>
+              <a:rPr sz="950" b="0" i="0">
+                <a:solidFill>
+                  <a:srgbClr val="000000"/>
+                </a:solidFill>
+                <a:latin typeface="微软雅黑"/>
+                <a:ea typeface="微软雅黑"/>
+                <a:cs typeface="微软雅黑"/>
+              </a:rPr>
+              <a:t>联合 IT 装备部完成 </a:t>
+            </a:r>
+            <a:r>
+              <a:rPr sz="950" b="1" i="0">
+                <a:solidFill>
+                  <a:srgbClr val="0000FF"/>
+                </a:solidFill>
+                <a:latin typeface="微软雅黑"/>
+                <a:ea typeface="微软雅黑"/>
+                <a:cs typeface="微软雅黑"/>
+              </a:rPr>
+              <a:t>Skill 门禁检测规则集定义</a:t>
+            </a:r>
+            <a:r>
+              <a:rPr sz="950" b="0" i="0">
+                <a:solidFill>
+                  <a:srgbClr val="000000"/>
+                </a:solidFill>
+                <a:latin typeface="微软雅黑"/>
+                <a:ea typeface="微软雅黑"/>
+                <a:cs typeface="微软雅黑"/>
+              </a:rPr>
+              <a:t>(</a:t>
+            </a:r>
+            <a:r>
+              <a:rPr sz="950" b="1" i="0">
+                <a:solidFill>
+                  <a:srgbClr val="0000FF"/>
+                </a:solidFill>
+                <a:latin typeface="微软雅黑"/>
+                <a:ea typeface="微软雅黑"/>
+                <a:cs typeface="微软雅黑"/>
+              </a:rPr>
+              <a:t>最小集 / 扩展级</a:t>
+            </a:r>
+            <a:r>
+              <a:rPr sz="950" b="0" i="0">
+                <a:solidFill>
+                  <a:srgbClr val="000000"/>
+                </a:solidFill>
+                <a:latin typeface="微软雅黑"/>
+                <a:ea typeface="微软雅黑"/>
+                <a:cs typeface="微软雅黑"/>
+              </a:rPr>
+              <a:t>),供各 LM 团队</a:t>
+            </a:r>
+            <a:r>
+              <a:rPr sz="950" b="1" i="0">
+                <a:solidFill>
+                  <a:srgbClr val="0000FF"/>
+                </a:solidFill>
+                <a:latin typeface="微软雅黑"/>
+                <a:ea typeface="微软雅黑"/>
+                <a:cs typeface="微软雅黑"/>
+              </a:rPr>
+              <a:t>部署 skill 门禁</a:t>
+            </a:r>
+            <a:r>
+              <a:rPr sz="950" b="0" i="0">
+                <a:solidFill>
+                  <a:srgbClr val="000000"/>
+                </a:solidFill>
+                <a:latin typeface="微软雅黑"/>
+                <a:ea typeface="微软雅黑"/>
+                <a:cs typeface="微软雅黑"/>
+              </a:rPr>
+              <a:t>。</a:t>
+            </a:r>
+          </a:p>
+        </p:txBody>
+      </p:sp>
+      <p:sp>
+        <p:nvSpPr>
+          <p:cNvPr id="10" name="Rounded Rectangle 9"/>
+          <p:cNvSpPr/>
+          <p:nvPr/>
+        </p:nvSpPr>
+        <p:spPr>
+          <a:xfrm>
+            <a:off x="6233007" y="2212848"/>
+            <a:ext cx="5501487" cy="4206240"/>
+          </a:xfrm>
+          <a:prstGeom prst="roundRect">
+            <a:avLst>
+              <a:gd name="adj" fmla="val 3000"/>
+            </a:avLst>
+          </a:prstGeom>
+          <a:solidFill>
+            <a:srgbClr val="FBFBFB"/>
+          </a:solidFill>
+          <a:ln w="15875">
+            <a:solidFill>
+              <a:srgbClr val="BFBFBF"/>
+            </a:solidFill>
+            <a:prstDash val="dash"/>
+          </a:ln>
+          <a:effectLst/>
+        </p:spPr>
+        <p:style>
+          <a:lnRef idx="1">
+            <a:schemeClr val="accent1"/>
+          </a:lnRef>
+          <a:fillRef idx="3">
+            <a:schemeClr val="accent1"/>
+          </a:fillRef>
+          <a:effectRef idx="2">
+            <a:schemeClr val="accent1"/>
+          </a:effectRef>
+          <a:fontRef idx="minor">
+            <a:schemeClr val="lt1"/>
+          </a:fontRef>
+        </p:style>
+        <p:txBody>
+          <a:bodyPr rtlCol="0" anchor="ctr" wrap="square" lIns="146304" rIns="146304"/>
+          <a:lstStyle/>
+          <a:p>
+            <a:pPr algn="ctr"/>
+            <a:r>
+              <a:rPr sz="1300" b="1" i="0">
+                <a:solidFill>
+                  <a:srgbClr val="808080"/>
+                </a:solidFill>
+                <a:latin typeface="微软雅黑"/>
+                <a:ea typeface="微软雅黑"/>
+                <a:cs typeface="微软雅黑"/>
+              </a:rPr>
+              <a:t>现状信息(粘贴区 · 预留)</a:t>
+            </a:r>
+          </a:p>
+          <a:p>
+            <a:pPr algn="ctr">
+              <a:spcBef>
+                <a:spcPts val="600"/>
+              </a:spcBef>
+            </a:pPr>
+            <a:r>
+              <a:rPr sz="1000" b="0" i="0">
+                <a:solidFill>
+                  <a:srgbClr val="A6A6A6"/>
+                </a:solidFill>
+                <a:latin typeface="微软雅黑"/>
+                <a:ea typeface="微软雅黑"/>
+                <a:cs typeface="微软雅黑"/>
+              </a:rPr>
+              <a:t>此区域预留,用于粘贴规范/门禁/试点等现状信息(截图、表格或数据)</a:t>
+            </a:r>
+          </a:p>
+        </p:txBody>
+      </p:sp>
+      <p:sp>
+        <p:nvSpPr>
+          <p:cNvPr id="11" name="TextBox 10"/>
+          <p:cNvSpPr txBox="1"/>
+          <p:nvPr/>
+        </p:nvSpPr>
+        <p:spPr>
+          <a:xfrm>
+            <a:off x="457200" y="6492240"/>
+            <a:ext cx="11277295" cy="274320"/>
+          </a:xfrm>
+          <a:prstGeom prst="rect">
+            <a:avLst/>
+          </a:prstGeom>
+          <a:noFill/>
+        </p:spPr>
+        <p:txBody>
+          <a:bodyPr wrap="none" tIns="0" bIns="0">
+            <a:spAutoFit/>
+          </a:bodyPr>
+          <a:lstStyle/>
+          <a:p>
+            <a:pPr algn="r"/>
+            <a:r>
+              <a:rPr sz="900" b="0" i="0">
+                <a:solidFill>
+                  <a:srgbClr val="808080"/>
+                </a:solidFill>
+                <a:latin typeface="微软雅黑"/>
+                <a:ea typeface="微软雅黑"/>
+                <a:cs typeface="微软雅黑"/>
+              </a:rPr>
+              <a:t>第 3 页 / 共 3 页</a:t>
             </a:r>
           </a:p>
         </p:txBody>
